--- a/簡報.pptx
+++ b/簡報.pptx
@@ -221,7 +221,7 @@
           <a:p>
             <a:fld id="{B82F47D5-2AE8-4532-AC87-B7090C200CFC}" type="datetimeFigureOut">
               <a:rPr lang="zh-TW" altLang="en-US" smtClean="0"/>
-              <a:t>2026/5/20</a:t>
+              <a:t>2026/6/6</a:t>
             </a:fld>
             <a:endParaRPr lang="zh-TW" altLang="en-US"/>
           </a:p>
@@ -1331,7 +1331,7 @@
           <a:p>
             <a:fld id="{4A1BE88F-DBEB-4E6C-BEC4-5BF3EB6BF339}" type="datetimeFigureOut">
               <a:rPr lang="zh-TW" altLang="en-US" smtClean="0"/>
-              <a:t>2026/5/20</a:t>
+              <a:t>2026/6/6</a:t>
             </a:fld>
             <a:endParaRPr lang="zh-TW" altLang="en-US"/>
           </a:p>
@@ -1530,7 +1530,7 @@
           <a:p>
             <a:fld id="{4A1BE88F-DBEB-4E6C-BEC4-5BF3EB6BF339}" type="datetimeFigureOut">
               <a:rPr lang="zh-TW" altLang="en-US" smtClean="0"/>
-              <a:t>2026/5/20</a:t>
+              <a:t>2026/6/6</a:t>
             </a:fld>
             <a:endParaRPr lang="zh-TW" altLang="en-US"/>
           </a:p>
@@ -1739,7 +1739,7 @@
           <a:p>
             <a:fld id="{4A1BE88F-DBEB-4E6C-BEC4-5BF3EB6BF339}" type="datetimeFigureOut">
               <a:rPr lang="zh-TW" altLang="en-US" smtClean="0"/>
-              <a:t>2026/5/20</a:t>
+              <a:t>2026/6/6</a:t>
             </a:fld>
             <a:endParaRPr lang="zh-TW" altLang="en-US"/>
           </a:p>
@@ -1991,7 +1991,7 @@
           <a:p>
             <a:fld id="{4A1BE88F-DBEB-4E6C-BEC4-5BF3EB6BF339}" type="datetimeFigureOut">
               <a:rPr lang="zh-TW" altLang="en-US" smtClean="0"/>
-              <a:t>2026/5/20</a:t>
+              <a:t>2026/6/6</a:t>
             </a:fld>
             <a:endParaRPr lang="zh-TW" altLang="en-US"/>
           </a:p>
@@ -2267,7 +2267,7 @@
           <a:p>
             <a:fld id="{4A1BE88F-DBEB-4E6C-BEC4-5BF3EB6BF339}" type="datetimeFigureOut">
               <a:rPr lang="zh-TW" altLang="en-US" smtClean="0"/>
-              <a:t>2026/5/20</a:t>
+              <a:t>2026/6/6</a:t>
             </a:fld>
             <a:endParaRPr lang="zh-TW" altLang="en-US"/>
           </a:p>
@@ -2533,7 +2533,7 @@
           <a:p>
             <a:fld id="{4A1BE88F-DBEB-4E6C-BEC4-5BF3EB6BF339}" type="datetimeFigureOut">
               <a:rPr lang="zh-TW" altLang="en-US" smtClean="0"/>
-              <a:t>2026/5/20</a:t>
+              <a:t>2026/6/6</a:t>
             </a:fld>
             <a:endParaRPr lang="zh-TW" altLang="en-US"/>
           </a:p>
@@ -2946,7 +2946,7 @@
           <a:p>
             <a:fld id="{4A1BE88F-DBEB-4E6C-BEC4-5BF3EB6BF339}" type="datetimeFigureOut">
               <a:rPr lang="zh-TW" altLang="en-US" smtClean="0"/>
-              <a:t>2026/5/20</a:t>
+              <a:t>2026/6/6</a:t>
             </a:fld>
             <a:endParaRPr lang="zh-TW" altLang="en-US"/>
           </a:p>
@@ -3088,7 +3088,7 @@
           <a:p>
             <a:fld id="{4A1BE88F-DBEB-4E6C-BEC4-5BF3EB6BF339}" type="datetimeFigureOut">
               <a:rPr lang="zh-TW" altLang="en-US" smtClean="0"/>
-              <a:t>2026/5/20</a:t>
+              <a:t>2026/6/6</a:t>
             </a:fld>
             <a:endParaRPr lang="zh-TW" altLang="en-US"/>
           </a:p>
@@ -3202,7 +3202,7 @@
           <a:p>
             <a:fld id="{4A1BE88F-DBEB-4E6C-BEC4-5BF3EB6BF339}" type="datetimeFigureOut">
               <a:rPr lang="zh-TW" altLang="en-US" smtClean="0"/>
-              <a:t>2026/5/20</a:t>
+              <a:t>2026/6/6</a:t>
             </a:fld>
             <a:endParaRPr lang="zh-TW" altLang="en-US"/>
           </a:p>
@@ -3514,7 +3514,7 @@
           <a:p>
             <a:fld id="{4A1BE88F-DBEB-4E6C-BEC4-5BF3EB6BF339}" type="datetimeFigureOut">
               <a:rPr lang="zh-TW" altLang="en-US" smtClean="0"/>
-              <a:t>2026/5/20</a:t>
+              <a:t>2026/6/6</a:t>
             </a:fld>
             <a:endParaRPr lang="zh-TW" altLang="en-US"/>
           </a:p>
@@ -3803,7 +3803,7 @@
           <a:p>
             <a:fld id="{4A1BE88F-DBEB-4E6C-BEC4-5BF3EB6BF339}" type="datetimeFigureOut">
               <a:rPr lang="zh-TW" altLang="en-US" smtClean="0"/>
-              <a:t>2026/5/20</a:t>
+              <a:t>2026/6/6</a:t>
             </a:fld>
             <a:endParaRPr lang="zh-TW" altLang="en-US"/>
           </a:p>
@@ -4045,7 +4045,7 @@
           <a:p>
             <a:fld id="{4A1BE88F-DBEB-4E6C-BEC4-5BF3EB6BF339}" type="datetimeFigureOut">
               <a:rPr lang="zh-TW" altLang="en-US" smtClean="0"/>
-              <a:t>2026/5/20</a:t>
+              <a:t>2026/6/6</a:t>
             </a:fld>
             <a:endParaRPr lang="zh-TW" altLang="en-US"/>
           </a:p>
@@ -5284,11 +5284,11 @@
   <p:clrMapOvr>
     <a:masterClrMapping/>
   </p:clrMapOvr>
-  <mc:AlternateContent xmlns:mc="http://schemas.openxmlformats.org/markup-compatibility/2006">
-    <mc:Choice xmlns:p14="http://schemas.microsoft.com/office/powerpoint/2010/main" Requires="p14">
+  <mc:AlternateContent xmlns:mc="http://schemas.openxmlformats.org/markup-compatibility/2006" xmlns:p14="http://schemas.microsoft.com/office/powerpoint/2010/main">
+    <mc:Choice Requires="p14">
       <p:transition p14:dur="0" advClick="0" advTm="0"/>
     </mc:Choice>
-    <mc:Fallback>
+    <mc:Fallback xmlns="">
       <p:transition advClick="0" advTm="0"/>
     </mc:Fallback>
   </mc:AlternateContent>
@@ -8824,11 +8824,11 @@
   <p:clrMapOvr>
     <a:masterClrMapping/>
   </p:clrMapOvr>
-  <mc:AlternateContent xmlns:mc="http://schemas.openxmlformats.org/markup-compatibility/2006">
-    <mc:Choice xmlns:p14="http://schemas.microsoft.com/office/powerpoint/2010/main" Requires="p14">
+  <mc:AlternateContent xmlns:mc="http://schemas.openxmlformats.org/markup-compatibility/2006" xmlns:p14="http://schemas.microsoft.com/office/powerpoint/2010/main">
+    <mc:Choice Requires="p14">
       <p:transition p14:dur="0" advClick="0" advTm="0"/>
     </mc:Choice>
-    <mc:Fallback>
+    <mc:Fallback xmlns="">
       <p:transition advClick="0" advTm="0"/>
     </mc:Fallback>
   </mc:AlternateContent>
@@ -13805,11 +13805,11 @@
   <p:clrMapOvr>
     <a:masterClrMapping/>
   </p:clrMapOvr>
-  <mc:AlternateContent xmlns:mc="http://schemas.openxmlformats.org/markup-compatibility/2006">
-    <mc:Choice xmlns:p14="http://schemas.microsoft.com/office/powerpoint/2010/main" Requires="p14">
+  <mc:AlternateContent xmlns:mc="http://schemas.openxmlformats.org/markup-compatibility/2006" xmlns:p14="http://schemas.microsoft.com/office/powerpoint/2010/main">
+    <mc:Choice Requires="p14">
       <p:transition p14:dur="0" advClick="0" advTm="0"/>
     </mc:Choice>
-    <mc:Fallback>
+    <mc:Fallback xmlns="">
       <p:transition advClick="0" advTm="0"/>
     </mc:Fallback>
   </mc:AlternateContent>
@@ -14655,11 +14655,11 @@
   <p:clrMapOvr>
     <a:masterClrMapping/>
   </p:clrMapOvr>
-  <mc:AlternateContent xmlns:mc="http://schemas.openxmlformats.org/markup-compatibility/2006">
-    <mc:Choice xmlns:p14="http://schemas.microsoft.com/office/powerpoint/2010/main" Requires="p14">
+  <mc:AlternateContent xmlns:mc="http://schemas.openxmlformats.org/markup-compatibility/2006" xmlns:p14="http://schemas.microsoft.com/office/powerpoint/2010/main">
+    <mc:Choice Requires="p14">
       <p:transition p14:dur="0" advClick="0" advTm="0"/>
     </mc:Choice>
-    <mc:Fallback>
+    <mc:Fallback xmlns="">
       <p:transition advClick="0" advTm="0"/>
     </mc:Fallback>
   </mc:AlternateContent>
@@ -17808,11 +17808,11 @@
   <p:clrMapOvr>
     <a:masterClrMapping/>
   </p:clrMapOvr>
-  <mc:AlternateContent xmlns:mc="http://schemas.openxmlformats.org/markup-compatibility/2006">
-    <mc:Choice xmlns:p14="http://schemas.microsoft.com/office/powerpoint/2010/main" Requires="p14">
+  <mc:AlternateContent xmlns:mc="http://schemas.openxmlformats.org/markup-compatibility/2006" xmlns:p14="http://schemas.microsoft.com/office/powerpoint/2010/main">
+    <mc:Choice Requires="p14">
       <p:transition p14:dur="0" advClick="0" advTm="0"/>
     </mc:Choice>
-    <mc:Fallback>
+    <mc:Fallback xmlns="">
       <p:transition advClick="0" advTm="0"/>
     </mc:Fallback>
   </mc:AlternateContent>
@@ -18755,11 +18755,11 @@
   <p:clrMapOvr>
     <a:masterClrMapping/>
   </p:clrMapOvr>
-  <mc:AlternateContent xmlns:mc="http://schemas.openxmlformats.org/markup-compatibility/2006">
-    <mc:Choice xmlns:p14="http://schemas.microsoft.com/office/powerpoint/2010/main" Requires="p14">
+  <mc:AlternateContent xmlns:mc="http://schemas.openxmlformats.org/markup-compatibility/2006" xmlns:p14="http://schemas.microsoft.com/office/powerpoint/2010/main">
+    <mc:Choice Requires="p14">
       <p:transition p14:dur="0" advClick="0"/>
     </mc:Choice>
-    <mc:Fallback>
+    <mc:Fallback xmlns="">
       <p:transition advClick="0"/>
     </mc:Fallback>
   </mc:AlternateContent>
@@ -19593,11 +19593,11 @@
   <p:clrMapOvr>
     <a:masterClrMapping/>
   </p:clrMapOvr>
-  <mc:AlternateContent xmlns:mc="http://schemas.openxmlformats.org/markup-compatibility/2006">
-    <mc:Choice xmlns:p14="http://schemas.microsoft.com/office/powerpoint/2010/main" Requires="p14">
+  <mc:AlternateContent xmlns:mc="http://schemas.openxmlformats.org/markup-compatibility/2006" xmlns:p14="http://schemas.microsoft.com/office/powerpoint/2010/main">
+    <mc:Choice Requires="p14">
       <p:transition p14:dur="0" advClick="0"/>
     </mc:Choice>
-    <mc:Fallback>
+    <mc:Fallback xmlns="">
       <p:transition advClick="0"/>
     </mc:Fallback>
   </mc:AlternateContent>
@@ -20078,11 +20078,11 @@
   <p:clrMapOvr>
     <a:masterClrMapping/>
   </p:clrMapOvr>
-  <mc:AlternateContent xmlns:mc="http://schemas.openxmlformats.org/markup-compatibility/2006">
-    <mc:Choice xmlns:p14="http://schemas.microsoft.com/office/powerpoint/2010/main" Requires="p14">
+  <mc:AlternateContent xmlns:mc="http://schemas.openxmlformats.org/markup-compatibility/2006" xmlns:p14="http://schemas.microsoft.com/office/powerpoint/2010/main">
+    <mc:Choice Requires="p14">
       <p:transition p14:dur="0" advClick="0"/>
     </mc:Choice>
-    <mc:Fallback>
+    <mc:Fallback xmlns="">
       <p:transition advClick="0"/>
     </mc:Fallback>
   </mc:AlternateContent>
@@ -20830,7 +20830,27 @@
                 <a:latin typeface="Times New Roman" panose="02020603050405020304" pitchFamily="18" charset="0"/>
                 <a:ea typeface="標楷體" panose="03000509000000000000" pitchFamily="65" charset="-120"/>
               </a:rPr>
-              <a:t>、PINN 與強化學習三大技術於化工製程</a:t>
+              <a:t>、PINN 與強化學習</a:t>
+            </a:r>
+            <a:r>
+              <a:rPr lang="en-US" altLang="zh-TW" sz="1400" dirty="0">
+                <a:solidFill>
+                  <a:schemeClr val="tx1"/>
+                </a:solidFill>
+                <a:latin typeface="Times New Roman" panose="02020603050405020304" pitchFamily="18" charset="0"/>
+                <a:ea typeface="標楷體" panose="03000509000000000000" pitchFamily="65" charset="-120"/>
+              </a:rPr>
+              <a:t>(PPO)</a:t>
+            </a:r>
+            <a:r>
+              <a:rPr lang="zh-TW" altLang="en-US" sz="1400" dirty="0">
+                <a:solidFill>
+                  <a:schemeClr val="tx1"/>
+                </a:solidFill>
+                <a:latin typeface="Times New Roman" panose="02020603050405020304" pitchFamily="18" charset="0"/>
+                <a:ea typeface="標楷體" panose="03000509000000000000" pitchFamily="65" charset="-120"/>
+              </a:rPr>
+              <a:t>三大技術於化工製程</a:t>
             </a:r>
           </a:p>
           <a:p>
@@ -21095,11 +21115,11 @@
   <p:clrMapOvr>
     <a:masterClrMapping/>
   </p:clrMapOvr>
-  <mc:AlternateContent xmlns:mc="http://schemas.openxmlformats.org/markup-compatibility/2006">
-    <mc:Choice xmlns:p14="http://schemas.microsoft.com/office/powerpoint/2010/main" Requires="p14">
+  <mc:AlternateContent xmlns:mc="http://schemas.openxmlformats.org/markup-compatibility/2006" xmlns:p14="http://schemas.microsoft.com/office/powerpoint/2010/main">
+    <mc:Choice Requires="p14">
       <p:transition p14:dur="0"/>
     </mc:Choice>
-    <mc:Fallback>
+    <mc:Fallback xmlns="">
       <p:transition/>
     </mc:Fallback>
   </mc:AlternateContent>
@@ -21177,11 +21197,11 @@
   <p:clrMapOvr>
     <a:masterClrMapping/>
   </p:clrMapOvr>
-  <mc:AlternateContent xmlns:mc="http://schemas.openxmlformats.org/markup-compatibility/2006">
-    <mc:Choice xmlns:p14="http://schemas.microsoft.com/office/powerpoint/2010/main" Requires="p14">
+  <mc:AlternateContent xmlns:mc="http://schemas.openxmlformats.org/markup-compatibility/2006" xmlns:p14="http://schemas.microsoft.com/office/powerpoint/2010/main">
+    <mc:Choice Requires="p14">
       <p:transition p14:dur="0" advClick="0"/>
     </mc:Choice>
-    <mc:Fallback>
+    <mc:Fallback xmlns="">
       <p:transition advClick="0"/>
     </mc:Fallback>
   </mc:AlternateContent>
@@ -21613,11 +21633,11 @@
   <p:clrMapOvr>
     <a:masterClrMapping/>
   </p:clrMapOvr>
-  <mc:AlternateContent xmlns:mc="http://schemas.openxmlformats.org/markup-compatibility/2006">
-    <mc:Choice xmlns:p14="http://schemas.microsoft.com/office/powerpoint/2010/main" Requires="p14">
+  <mc:AlternateContent xmlns:mc="http://schemas.openxmlformats.org/markup-compatibility/2006" xmlns:p14="http://schemas.microsoft.com/office/powerpoint/2010/main">
+    <mc:Choice Requires="p14">
       <p:transition p14:dur="0" advClick="0" advTm="0"/>
     </mc:Choice>
-    <mc:Fallback>
+    <mc:Fallback xmlns="">
       <p:transition advClick="0" advTm="0"/>
     </mc:Fallback>
   </mc:AlternateContent>
